--- a/tests/fixtures/ppt/minimal_text_shapes.pptx
+++ b/tests/fixtures/ppt/minimal_text_shapes.pptx
@@ -3693,6 +3693,7 @@
             <p:nvSpPr>
               <p:cNvPr id="302" name="NestedTitle"/>
               <p:cNvSpPr txBox="1"/>
+              <p:nvPr/>
             </p:nvSpPr>
             <p:spPr>
               <a:xfrm>
@@ -3717,6 +3718,7 @@
             <p:nvSpPr>
               <p:cNvPr id="303" name="NestedBody"/>
               <p:cNvSpPr txBox="1"/>
+              <p:nvPr/>
             </p:nvSpPr>
             <p:spPr>
               <a:xfrm>
@@ -3742,6 +3744,7 @@
           <p:nvSpPr>
             <p:cNvPr id="304" name="OuterText"/>
             <p:cNvSpPr txBox="1"/>
+            <p:nvPr/>
           </p:nvSpPr>
           <p:spPr>
             <a:xfrm>
